--- a/lessons/5-4/slides.pptx
+++ b/lessons/5-4/slides.pptx
@@ -11023,7 +11023,7 @@
       </p:sp>
       <p:sp>
         <p:nvSpPr>
-          <p:cNvPr id="20" name="Shape 18"/>
+          <p:cNvPr id="20" name="Text 18"/>
           <p:cNvSpPr/>
           <p:nvPr/>
         </p:nvSpPr>
@@ -11044,33 +11044,7 @@
             <a:solidFill>
               <a:srgbClr val="D6DBDF"/>
             </a:solidFill>
-            <a:prstDash val="solid"/>
           </a:ln>
-          <a:effectLst>
-            <a:outerShdw sx="100000" sy="100000" kx="0" ky="0" algn="bl" rotWithShape="0" blurRad="50800" dist="12700" dir="5400000">
-              <a:srgbClr val="1C2E42">
-                <a:alpha val="10000"/>
-              </a:srgbClr>
-            </a:outerShdw>
-          </a:effectLst>
-        </p:spPr>
-      </p:sp>
-      <p:sp>
-        <p:nvSpPr>
-          <p:cNvPr id="21" name="Text 19"/>
-          <p:cNvSpPr/>
-          <p:nvPr/>
-        </p:nvSpPr>
-        <p:spPr>
-          <a:xfrm>
-            <a:off x="685800" y="1481328"/>
-            <a:ext cx="1447800" cy="384048"/>
-          </a:xfrm>
-          <a:prstGeom prst="rect">
-            <a:avLst/>
-          </a:prstGeom>
-          <a:noFill/>
-          <a:ln/>
         </p:spPr>
         <p:txBody>
           <a:bodyPr wrap="square" rtlCol="0" anchor="ctr"/>
@@ -11080,7 +11054,7 @@
               <a:buNone/>
             </a:pPr>
             <a:r>
-              <a:rPr lang="en-US" sz="900" dirty="0">
+              <a:rPr lang="en-US" sz="900" b="1" dirty="0">
                 <a:solidFill>
                   <a:srgbClr val="17324D"/>
                 </a:solidFill>
@@ -11096,7 +11070,7 @@
       </p:sp>
       <p:sp>
         <p:nvSpPr>
-          <p:cNvPr id="22" name="Shape 20"/>
+          <p:cNvPr id="21" name="Text 19"/>
           <p:cNvSpPr/>
           <p:nvPr/>
         </p:nvSpPr>
@@ -11117,33 +11091,7 @@
             <a:solidFill>
               <a:srgbClr val="D6DBDF"/>
             </a:solidFill>
-            <a:prstDash val="solid"/>
           </a:ln>
-          <a:effectLst>
-            <a:outerShdw sx="100000" sy="100000" kx="0" ky="0" algn="bl" rotWithShape="0" blurRad="50800" dist="12700" dir="5400000">
-              <a:srgbClr val="1C2E42">
-                <a:alpha val="10000"/>
-              </a:srgbClr>
-            </a:outerShdw>
-          </a:effectLst>
-        </p:spPr>
-      </p:sp>
-      <p:sp>
-        <p:nvSpPr>
-          <p:cNvPr id="23" name="Text 21"/>
-          <p:cNvSpPr/>
-          <p:nvPr/>
-        </p:nvSpPr>
-        <p:spPr>
-          <a:xfrm>
-            <a:off x="2453640" y="1481328"/>
-            <a:ext cx="1447800" cy="384048"/>
-          </a:xfrm>
-          <a:prstGeom prst="rect">
-            <a:avLst/>
-          </a:prstGeom>
-          <a:noFill/>
-          <a:ln/>
         </p:spPr>
         <p:txBody>
           <a:bodyPr wrap="square" rtlCol="0" anchor="ctr"/>
@@ -11153,7 +11101,7 @@
               <a:buNone/>
             </a:pPr>
             <a:r>
-              <a:rPr lang="en-US" sz="900" dirty="0">
+              <a:rPr lang="en-US" sz="900" b="1" dirty="0">
                 <a:solidFill>
                   <a:srgbClr val="17324D"/>
                 </a:solidFill>
@@ -11169,7 +11117,7 @@
       </p:sp>
       <p:sp>
         <p:nvSpPr>
-          <p:cNvPr id="24" name="Shape 22"/>
+          <p:cNvPr id="22" name="Text 20"/>
           <p:cNvSpPr/>
           <p:nvPr/>
         </p:nvSpPr>
@@ -11190,33 +11138,7 @@
             <a:solidFill>
               <a:srgbClr val="D6DBDF"/>
             </a:solidFill>
-            <a:prstDash val="solid"/>
           </a:ln>
-          <a:effectLst>
-            <a:outerShdw sx="100000" sy="100000" kx="0" ky="0" algn="bl" rotWithShape="0" blurRad="50800" dist="12700" dir="5400000">
-              <a:srgbClr val="1C2E42">
-                <a:alpha val="10000"/>
-              </a:srgbClr>
-            </a:outerShdw>
-          </a:effectLst>
-        </p:spPr>
-      </p:sp>
-      <p:sp>
-        <p:nvSpPr>
-          <p:cNvPr id="25" name="Text 23"/>
-          <p:cNvSpPr/>
-          <p:nvPr/>
-        </p:nvSpPr>
-        <p:spPr>
-          <a:xfrm>
-            <a:off x="4221480" y="1481328"/>
-            <a:ext cx="1447800" cy="384048"/>
-          </a:xfrm>
-          <a:prstGeom prst="rect">
-            <a:avLst/>
-          </a:prstGeom>
-          <a:noFill/>
-          <a:ln/>
         </p:spPr>
         <p:txBody>
           <a:bodyPr wrap="square" rtlCol="0" anchor="ctr"/>
@@ -11226,7 +11148,7 @@
               <a:buNone/>
             </a:pPr>
             <a:r>
-              <a:rPr lang="en-US" sz="900" dirty="0">
+              <a:rPr lang="en-US" sz="900" b="1" dirty="0">
                 <a:solidFill>
                   <a:srgbClr val="17324D"/>
                 </a:solidFill>
@@ -11242,7 +11164,7 @@
       </p:sp>
       <p:sp>
         <p:nvSpPr>
-          <p:cNvPr id="26" name="Shape 24"/>
+          <p:cNvPr id="23" name="Text 21"/>
           <p:cNvSpPr/>
           <p:nvPr/>
         </p:nvSpPr>
@@ -11263,33 +11185,7 @@
             <a:solidFill>
               <a:srgbClr val="D6DBDF"/>
             </a:solidFill>
-            <a:prstDash val="solid"/>
           </a:ln>
-          <a:effectLst>
-            <a:outerShdw sx="100000" sy="100000" kx="0" ky="0" algn="bl" rotWithShape="0" blurRad="50800" dist="12700" dir="5400000">
-              <a:srgbClr val="1C2E42">
-                <a:alpha val="10000"/>
-              </a:srgbClr>
-            </a:outerShdw>
-          </a:effectLst>
-        </p:spPr>
-      </p:sp>
-      <p:sp>
-        <p:nvSpPr>
-          <p:cNvPr id="27" name="Text 25"/>
-          <p:cNvSpPr/>
-          <p:nvPr/>
-        </p:nvSpPr>
-        <p:spPr>
-          <a:xfrm>
-            <a:off x="685800" y="1975104"/>
-            <a:ext cx="1447800" cy="384048"/>
-          </a:xfrm>
-          <a:prstGeom prst="rect">
-            <a:avLst/>
-          </a:prstGeom>
-          <a:noFill/>
-          <a:ln/>
         </p:spPr>
         <p:txBody>
           <a:bodyPr wrap="square" rtlCol="0" anchor="ctr"/>
@@ -11299,7 +11195,7 @@
               <a:buNone/>
             </a:pPr>
             <a:r>
-              <a:rPr lang="en-US" sz="900" dirty="0">
+              <a:rPr lang="en-US" sz="900" b="1" dirty="0">
                 <a:solidFill>
                   <a:srgbClr val="17324D"/>
                 </a:solidFill>
@@ -11315,7 +11211,7 @@
       </p:sp>
       <p:sp>
         <p:nvSpPr>
-          <p:cNvPr id="28" name="Shape 26"/>
+          <p:cNvPr id="24" name="Shape 22"/>
           <p:cNvSpPr/>
           <p:nvPr/>
         </p:nvSpPr>
@@ -11349,7 +11245,7 @@
       </p:sp>
       <p:sp>
         <p:nvSpPr>
-          <p:cNvPr id="29" name="Text 27"/>
+          <p:cNvPr id="25" name="Text 23"/>
           <p:cNvSpPr/>
           <p:nvPr/>
         </p:nvSpPr>
@@ -11390,7 +11286,7 @@
       </p:sp>
       <p:sp>
         <p:nvSpPr>
-          <p:cNvPr id="30" name="Shape 28"/>
+          <p:cNvPr id="26" name="Shape 24"/>
           <p:cNvSpPr/>
           <p:nvPr/>
         </p:nvSpPr>
@@ -11424,7 +11320,7 @@
       </p:sp>
       <p:sp>
         <p:nvSpPr>
-          <p:cNvPr id="31" name="Text 29"/>
+          <p:cNvPr id="27" name="Text 25"/>
           <p:cNvSpPr/>
           <p:nvPr/>
         </p:nvSpPr>
@@ -11465,7 +11361,7 @@
       </p:sp>
       <p:sp>
         <p:nvSpPr>
-          <p:cNvPr id="32" name="Shape 30"/>
+          <p:cNvPr id="28" name="Shape 26"/>
           <p:cNvSpPr/>
           <p:nvPr/>
         </p:nvSpPr>
@@ -11499,7 +11395,7 @@
       </p:sp>
       <p:sp>
         <p:nvSpPr>
-          <p:cNvPr id="33" name="Text 31"/>
+          <p:cNvPr id="29" name="Text 27"/>
           <p:cNvSpPr/>
           <p:nvPr/>
         </p:nvSpPr>
@@ -11540,7 +11436,7 @@
       </p:sp>
       <p:sp>
         <p:nvSpPr>
-          <p:cNvPr id="34" name="Text 32"/>
+          <p:cNvPr id="30" name="Text 28"/>
           <p:cNvSpPr/>
           <p:nvPr/>
         </p:nvSpPr>
@@ -11579,7 +11475,7 @@
       </p:sp>
       <p:sp>
         <p:nvSpPr>
-          <p:cNvPr id="35" name="Shape 33"/>
+          <p:cNvPr id="31" name="Shape 29"/>
           <p:cNvSpPr/>
           <p:nvPr/>
         </p:nvSpPr>
@@ -11602,7 +11498,7 @@
       </p:sp>
       <p:sp>
         <p:nvSpPr>
-          <p:cNvPr id="36" name="Shape 34"/>
+          <p:cNvPr id="32" name="Shape 30"/>
           <p:cNvSpPr/>
           <p:nvPr/>
         </p:nvSpPr>
@@ -11625,7 +11521,7 @@
       </p:sp>
       <p:sp>
         <p:nvSpPr>
-          <p:cNvPr id="37" name="Shape 35"/>
+          <p:cNvPr id="33" name="Shape 31"/>
           <p:cNvSpPr/>
           <p:nvPr/>
         </p:nvSpPr>
@@ -11648,7 +11544,7 @@
       </p:sp>
       <p:sp>
         <p:nvSpPr>
-          <p:cNvPr id="38" name="Shape 36"/>
+          <p:cNvPr id="34" name="Shape 32"/>
           <p:cNvSpPr/>
           <p:nvPr/>
         </p:nvSpPr>
@@ -11671,7 +11567,7 @@
       </p:sp>
       <p:sp>
         <p:nvSpPr>
-          <p:cNvPr id="39" name="Shape 37"/>
+          <p:cNvPr id="35" name="Shape 33"/>
           <p:cNvSpPr/>
           <p:nvPr/>
         </p:nvSpPr>

--- a/lessons/5-4/slides.pptx
+++ b/lessons/5-4/slides.pptx
@@ -2495,7 +2495,7 @@
                 <a:ea typeface="Outfit" pitchFamily="34" charset="-122"/>
                 <a:cs typeface="Outfit" pitchFamily="34" charset="-120"/>
               </a:rPr>
-              <a:t>6.G.1</a:t>
+              <a:t>6.GR.1</a:t>
             </a:r>
             <a:endParaRPr lang="en-US" sz="1000" dirty="0"/>
           </a:p>
@@ -3218,7 +3218,7 @@
                 <a:ea typeface="Outfit" pitchFamily="34" charset="-122"/>
                 <a:cs typeface="Outfit" pitchFamily="34" charset="-120"/>
               </a:rPr>
-              <a:t>6.G.1</a:t>
+              <a:t>6.GR.1</a:t>
             </a:r>
             <a:endParaRPr lang="en-US" sz="900" dirty="0"/>
           </a:p>
@@ -4328,7 +4328,7 @@
                 <a:ea typeface="Outfit" pitchFamily="34" charset="-122"/>
                 <a:cs typeface="Outfit" pitchFamily="34" charset="-120"/>
               </a:rPr>
-              <a:t>6.G.1</a:t>
+              <a:t>6.GR.1</a:t>
             </a:r>
             <a:endParaRPr lang="en-US" sz="900" dirty="0"/>
           </a:p>
@@ -5664,7 +5664,7 @@
                 <a:ea typeface="Outfit" pitchFamily="34" charset="-122"/>
                 <a:cs typeface="Outfit" pitchFamily="34" charset="-120"/>
               </a:rPr>
-              <a:t>6.G.1</a:t>
+              <a:t>6.GR.1</a:t>
             </a:r>
             <a:endParaRPr lang="en-US" sz="900" dirty="0"/>
           </a:p>
@@ -6958,7 +6958,7 @@
                 <a:ea typeface="Outfit" pitchFamily="34" charset="-122"/>
                 <a:cs typeface="Outfit" pitchFamily="34" charset="-120"/>
               </a:rPr>
-              <a:t>6.G.1</a:t>
+              <a:t>6.GR.1</a:t>
             </a:r>
             <a:endParaRPr lang="en-US" sz="900" dirty="0"/>
           </a:p>
@@ -8020,7 +8020,7 @@
                 <a:ea typeface="Outfit" pitchFamily="34" charset="-122"/>
                 <a:cs typeface="Outfit" pitchFamily="34" charset="-120"/>
               </a:rPr>
-              <a:t>6.G.1</a:t>
+              <a:t>6.GR.1</a:t>
             </a:r>
             <a:endParaRPr lang="en-US" sz="900" dirty="0"/>
           </a:p>
@@ -8985,7 +8985,7 @@
                 <a:ea typeface="Outfit" pitchFamily="34" charset="-122"/>
                 <a:cs typeface="Outfit" pitchFamily="34" charset="-120"/>
               </a:rPr>
-              <a:t>6.G.1</a:t>
+              <a:t>6.GR.1</a:t>
             </a:r>
             <a:endParaRPr lang="en-US" sz="900" dirty="0"/>
           </a:p>
@@ -9902,7 +9902,7 @@
                 <a:ea typeface="Outfit" pitchFamily="34" charset="-122"/>
                 <a:cs typeface="Outfit" pitchFamily="34" charset="-120"/>
               </a:rPr>
-              <a:t>6.G.1</a:t>
+              <a:t>6.GR.1</a:t>
             </a:r>
             <a:endParaRPr lang="en-US" sz="900" dirty="0"/>
           </a:p>
@@ -11030,7 +11030,7 @@
                 <a:ea typeface="Outfit" pitchFamily="34" charset="-122"/>
                 <a:cs typeface="Outfit" pitchFamily="34" charset="-120"/>
               </a:rPr>
-              <a:t>6.G.1</a:t>
+              <a:t>6.GR.1</a:t>
             </a:r>
             <a:endParaRPr lang="en-US" sz="900" dirty="0"/>
           </a:p>
@@ -12463,7 +12463,7 @@
                 <a:ea typeface="Outfit" pitchFamily="34" charset="-122"/>
                 <a:cs typeface="Outfit" pitchFamily="34" charset="-120"/>
               </a:rPr>
-              <a:t>6.G.1</a:t>
+              <a:t>6.GR.1</a:t>
             </a:r>
             <a:endParaRPr lang="en-US" sz="900" dirty="0"/>
           </a:p>
@@ -13277,7 +13277,7 @@
                 <a:ea typeface="Outfit" pitchFamily="34" charset="-122"/>
                 <a:cs typeface="Outfit" pitchFamily="34" charset="-120"/>
               </a:rPr>
-              <a:t>6.G.1</a:t>
+              <a:t>6.GR.1</a:t>
             </a:r>
             <a:endParaRPr lang="en-US" sz="900" dirty="0"/>
           </a:p>
@@ -14384,7 +14384,7 @@
                 <a:ea typeface="Outfit" pitchFamily="34" charset="-122"/>
                 <a:cs typeface="Outfit" pitchFamily="34" charset="-120"/>
               </a:rPr>
-              <a:t>6.G.1</a:t>
+              <a:t>6.GR.1</a:t>
             </a:r>
             <a:endParaRPr lang="en-US" sz="900" dirty="0"/>
           </a:p>
@@ -15491,7 +15491,7 @@
                 <a:ea typeface="Outfit" pitchFamily="34" charset="-122"/>
                 <a:cs typeface="Outfit" pitchFamily="34" charset="-120"/>
               </a:rPr>
-              <a:t>6.G.1</a:t>
+              <a:t>6.GR.1</a:t>
             </a:r>
             <a:endParaRPr lang="en-US" sz="900" dirty="0"/>
           </a:p>
@@ -16598,7 +16598,7 @@
                 <a:ea typeface="Outfit" pitchFamily="34" charset="-122"/>
                 <a:cs typeface="Outfit" pitchFamily="34" charset="-120"/>
               </a:rPr>
-              <a:t>6.G.1</a:t>
+              <a:t>6.GR.1</a:t>
             </a:r>
             <a:endParaRPr lang="en-US" sz="900" dirty="0"/>
           </a:p>
@@ -17658,7 +17658,7 @@
                 <a:ea typeface="Outfit" pitchFamily="34" charset="-122"/>
                 <a:cs typeface="Outfit" pitchFamily="34" charset="-120"/>
               </a:rPr>
-              <a:t>6.G.1</a:t>
+              <a:t>6.GR.1</a:t>
             </a:r>
             <a:endParaRPr lang="en-US" sz="900" dirty="0"/>
           </a:p>
@@ -18646,7 +18646,7 @@
                 <a:ea typeface="Outfit" pitchFamily="34" charset="-122"/>
                 <a:cs typeface="Outfit" pitchFamily="34" charset="-120"/>
               </a:rPr>
-              <a:t>6.G.1</a:t>
+              <a:t>6.GR.1</a:t>
             </a:r>
             <a:endParaRPr lang="en-US" sz="900" dirty="0"/>
           </a:p>
@@ -20177,7 +20177,7 @@
                           <a:ea typeface="Hanken Grotesk" pitchFamily="34" charset="-122"/>
                           <a:cs typeface="Hanken Grotesk" pitchFamily="34" charset="-120"/>
                         </a:rPr>
-                        <a:t>Composite figure</a:t>
+                        <a:t>Formula</a:t>
                       </a:r>
                       <a:pPr indent="0" marL="0">
                         <a:buNone/>
@@ -20201,7 +20201,7 @@
                           <a:ea typeface="Hanken Grotesk" pitchFamily="34" charset="-122"/>
                           <a:cs typeface="Hanken Grotesk" pitchFamily="34" charset="-120"/>
                         </a:rPr>
-                        <a:t>Figura compuesta</a:t>
+                        <a:t>Fórmula</a:t>
                       </a:r>
                       <a:endParaRPr lang="en-US" sz="950" dirty="0">
                         <a:latin typeface="Hanken Grotesk" charset="0"/>
@@ -20269,7 +20269,7 @@
                           <a:ea typeface="Hanken Grotesk" pitchFamily="34" charset="-122"/>
                           <a:cs typeface="Hanken Grotesk" pitchFamily="34" charset="-120"/>
                         </a:rPr>
-                        <a:t>A shape made by putting two or more simple shapes together.</a:t>
+                        <a:t>A math rule written with symbols.</a:t>
                       </a:r>
                       <a:pPr indent="0" marL="0">
                         <a:buNone/>
@@ -20293,7 +20293,7 @@
                           <a:ea typeface="Hanken Grotesk" pitchFamily="34" charset="-122"/>
                           <a:cs typeface="Hanken Grotesk" pitchFamily="34" charset="-120"/>
                         </a:rPr>
-                        <a:t>Una figura formada al juntar dos o más figuras simples.</a:t>
+                        <a:t>Una regla matemática escrita con símbolos.</a:t>
                       </a:r>
                       <a:endParaRPr lang="en-US" sz="900" dirty="0">
                         <a:latin typeface="Hanken Grotesk" charset="0"/>
@@ -20361,7 +20361,7 @@
                           <a:ea typeface="Hanken Grotesk" pitchFamily="34" charset="-122"/>
                           <a:cs typeface="Hanken Grotesk" pitchFamily="34" charset="-120"/>
                         </a:rPr>
-                        <a:t>A house shape = rectangle (walls) + triangle (roof); find each area, then add them together</a:t>
+                        <a:t>For a regular hexagon: Total Area = 6 × (½ × b × h), where b = side length and h = height of each triangle</a:t>
                       </a:r>
                       <a:endParaRPr lang="en-US" sz="900" dirty="0">
                         <a:latin typeface="Hanken Grotesk" charset="0"/>
@@ -20825,7 +20825,7 @@
                 <a:ea typeface="Outfit" pitchFamily="34" charset="-122"/>
                 <a:cs typeface="Outfit" pitchFamily="34" charset="-120"/>
               </a:rPr>
-              <a:t>6.G.1</a:t>
+              <a:t>6.GR.1</a:t>
             </a:r>
             <a:endParaRPr lang="en-US" sz="900" dirty="0"/>
           </a:p>

--- a/lessons/5-4/slides.pptx
+++ b/lessons/5-4/slides.pptx
@@ -694,7 +694,7 @@
           <a:p>
             <a:r>
               <a:rPr lang="en-US" dirty="0"/>
-              <a:t>Answer key — To find total area, multiply (not add): Total = 10.75 × 6 = 64.5 sq m. Six equal triangles means 6 times one triangle's area.</a:t>
+              <a:t>Answer key — Since the piece is cut out, subtract: 160 − 24 = 136 sq ft. When a piece is removed, subtract its area from the larger shape.</a:t>
             </a:r>
             <a:endParaRPr lang="en-US" dirty="0"/>
           </a:p>
@@ -2452,7 +2452,7 @@
                 <a:ea typeface="Outfit" pitchFamily="34" charset="-122"/>
                 <a:cs typeface="Outfit" pitchFamily="34" charset="-120"/>
               </a:rPr>
-              <a:t>Area of Regular Polygons</a:t>
+              <a:t>Area of Composite Figures</a:t>
             </a:r>
             <a:endParaRPr lang="en-US" sz="3000" dirty="0"/>
           </a:p>
@@ -2534,7 +2534,7 @@
                 <a:ea typeface="Hanken Grotesk" pitchFamily="34" charset="-122"/>
                 <a:cs typeface="Hanken Grotesk" pitchFamily="34" charset="-120"/>
               </a:rPr>
-              <a:t>Unit 5  ·  Lesson 5-4</a:t>
+              <a:t>Unit 5  ·  Lesson 5-5</a:t>
             </a:r>
             <a:endParaRPr lang="en-US" sz="1000" dirty="0"/>
           </a:p>
@@ -2919,7 +2919,7 @@
                 <a:ea typeface="Hanken Grotesk" pitchFamily="34" charset="-122"/>
                 <a:cs typeface="Hanken Grotesk" pitchFamily="34" charset="-120"/>
               </a:rPr>
-              <a:t>I can find the area of a regular polygon by decomposing it into triangles.</a:t>
+              <a:t>I can find the area of a composite figure by adding or subtracting the areas of basic shapes.</a:t>
             </a:r>
             <a:endParaRPr lang="en-US" sz="1100" dirty="0"/>
           </a:p>
@@ -3045,7 +3045,7 @@
                 <a:ea typeface="Hanken Grotesk" pitchFamily="34" charset="-122"/>
                 <a:cs typeface="Hanken Grotesk" pitchFamily="34" charset="-120"/>
               </a:rPr>
-              <a:t>I can explain my steps using the words regular polygon, decompose, triangle, and composite.</a:t>
+              <a:t>I can explain my steps using the words composite figure, decompose, add, and subtract.</a:t>
             </a:r>
             <a:endParaRPr lang="en-US" sz="1050" dirty="0"/>
           </a:p>
@@ -3437,7 +3437,7 @@
                 <a:ea typeface="Hanken Grotesk" pitchFamily="34" charset="-122"/>
                 <a:cs typeface="Hanken Grotesk" pitchFamily="34" charset="-120"/>
               </a:rPr>
-              <a:t>Reveal Math Grade 6  ·  Unit 5  ·  Lesson 5-4</a:t>
+              <a:t>Reveal Math Grade 6  ·  Unit 5  ·  Lesson 5-5</a:t>
             </a:r>
             <a:endParaRPr lang="en-US" sz="750" dirty="0"/>
           </a:p>
@@ -3549,7 +3549,7 @@
                 <a:ea typeface="Outfit" pitchFamily="34" charset="-122"/>
                 <a:cs typeface="Outfit" pitchFamily="34" charset="-120"/>
               </a:rPr>
-              <a:t>Drag each regular polygon to show how it can be decomposed into triangles. Match each polygon to the correct number of triangles it contains.</a:t>
+              <a:t>Break each composite figure into simpler shapes. Find the area of each part, then calculate the total area.</a:t>
             </a:r>
             <a:endParaRPr lang="en-US" sz="1050" dirty="0"/>
           </a:p>
@@ -3851,7 +3851,7 @@
                 <a:ea typeface="Outfit" pitchFamily="34" charset="-122"/>
                 <a:cs typeface="Outfit" pitchFamily="34" charset="-120"/>
               </a:rPr>
-              <a:t>Polygon</a:t>
+              <a:t>Group A</a:t>
             </a:r>
             <a:endParaRPr lang="en-US" sz="950" dirty="0"/>
           </a:p>
@@ -3926,7 +3926,7 @@
                 <a:ea typeface="Outfit" pitchFamily="34" charset="-122"/>
                 <a:cs typeface="Outfit" pitchFamily="34" charset="-120"/>
               </a:rPr>
-              <a:t>Number of Triangles</a:t>
+              <a:t>Group B</a:t>
             </a:r>
             <a:endParaRPr lang="en-US" sz="950" dirty="0"/>
           </a:p>
@@ -4040,7 +4040,7 @@
                 <a:ea typeface="Hanken Grotesk" pitchFamily="34" charset="-122"/>
                 <a:cs typeface="Hanken Grotesk" pitchFamily="34" charset="-120"/>
               </a:rPr>
-              <a:t>You matched each regular polygon to its number of center triangles. What pattern connects the number of SIDES to the number of TRIANGLES, and why?</a:t>
+              <a:t>For the U-shaped pool you subtracted a 6 ft by 4 ft cutout from a 14 ft by 10 ft rectangle. How do you decide when to ADD areas and when to SUBTRACT?</a:t>
             </a:r>
             <a:endParaRPr lang="en-US" sz="1000" dirty="0"/>
           </a:p>
@@ -4547,7 +4547,7 @@
                 <a:ea typeface="Hanken Grotesk" pitchFamily="34" charset="-122"/>
                 <a:cs typeface="Hanken Grotesk" pitchFamily="34" charset="-120"/>
               </a:rPr>
-              <a:t>Reveal Math Grade 6  ·  Unit 5  ·  Lesson 5-4</a:t>
+              <a:t>Reveal Math Grade 6  ·  Unit 5  ·  Lesson 5-5</a:t>
             </a:r>
             <a:endParaRPr lang="en-US" sz="750" dirty="0"/>
           </a:p>
@@ -4867,7 +4867,7 @@
                 <a:ea typeface="Hanken Grotesk" pitchFamily="34" charset="-122"/>
                 <a:cs typeface="Hanken Grotesk" pitchFamily="34" charset="-120"/>
               </a:rPr>
-              <a:t>Decompose the hexagon:  </a:t>
+              <a:t>Identify the shapes:  </a:t>
             </a:r>
             <a:pPr indent="0" marL="0">
               <a:buNone/>
@@ -4881,7 +4881,7 @@
                 <a:ea typeface="Courier New" pitchFamily="34" charset="-122"/>
                 <a:cs typeface="Courier New" pitchFamily="34" charset="-120"/>
               </a:rPr>
-              <a:t>A regular hexagon = 6 triangles</a:t>
+              <a:t>Rectangle: 16 ft × 10 ft, with a 4 ft × 6 ft piece cut from the corner</a:t>
             </a:r>
             <a:endParaRPr lang="en-US" sz="950" dirty="0"/>
           </a:p>
@@ -4934,7 +4934,7 @@
                 <a:ea typeface="Hanken Grotesk" pitchFamily="34" charset="-122"/>
                 <a:cs typeface="Hanken Grotesk" pitchFamily="34" charset="-120"/>
               </a:rPr>
-              <a:t>Find area of one triangle:  </a:t>
+              <a:t>Find the large rectangle area:  </a:t>
             </a:r>
             <a:pPr indent="0" marL="0">
               <a:buNone/>
@@ -4948,7 +4948,7 @@
                 <a:ea typeface="Courier New" pitchFamily="34" charset="-122"/>
                 <a:cs typeface="Courier New" pitchFamily="34" charset="-120"/>
               </a:rPr>
-              <a:t>b = 5 m, h = 4.3 m</a:t>
+              <a:t>A = 16 × 10 = 160 sq ft</a:t>
             </a:r>
             <a:endParaRPr lang="en-US" sz="950" dirty="0"/>
           </a:p>
@@ -5001,7 +5001,7 @@
                 <a:ea typeface="Hanken Grotesk" pitchFamily="34" charset="-122"/>
                 <a:cs typeface="Hanken Grotesk" pitchFamily="34" charset="-120"/>
               </a:rPr>
-              <a:t>Calculate one triangle:  </a:t>
+              <a:t>Find the cutout area:  </a:t>
             </a:r>
             <a:pPr indent="0" marL="0">
               <a:buNone/>
@@ -5015,7 +5015,7 @@
                 <a:ea typeface="Courier New" pitchFamily="34" charset="-122"/>
                 <a:cs typeface="Courier New" pitchFamily="34" charset="-120"/>
               </a:rPr>
-              <a:t>A = ½ × 5 × 4.3 = 10.75 sq m</a:t>
+              <a:t>A = 4 × 6 = 24 sq ft</a:t>
             </a:r>
             <a:endParaRPr lang="en-US" sz="950" dirty="0"/>
           </a:p>
@@ -5082,7 +5082,7 @@
                 <a:ea typeface="Courier New" pitchFamily="34" charset="-122"/>
                 <a:cs typeface="Courier New" pitchFamily="34" charset="-120"/>
               </a:rPr>
-              <a:t>Total = 10.75 + 6 = 16.75 sq m</a:t>
+              <a:t>Total = 160 + 24 = 184 sq ft</a:t>
             </a:r>
             <a:endParaRPr lang="en-US" sz="950" dirty="0"/>
           </a:p>
@@ -5883,7 +5883,7 @@
                 <a:ea typeface="Hanken Grotesk" pitchFamily="34" charset="-122"/>
                 <a:cs typeface="Hanken Grotesk" pitchFamily="34" charset="-120"/>
               </a:rPr>
-              <a:t>Reveal Math Grade 6  ·  Unit 5  ·  Lesson 5-4</a:t>
+              <a:t>Reveal Math Grade 6  ·  Unit 5  ·  Lesson 5-5</a:t>
             </a:r>
             <a:endParaRPr lang="en-US" sz="750" dirty="0"/>
           </a:p>
@@ -6095,7 +6095,7 @@
                 <a:ea typeface="Hanken Grotesk" pitchFamily="34" charset="-122"/>
                 <a:cs typeface="Hanken Grotesk" pitchFamily="34" charset="-120"/>
               </a:rPr>
-              <a:t>My hexagon has 6 equal sides. Each side is 6 feet, and each center triangle has a height of 5.2 feet.</a:t>
+              <a:t>My L-shaped room splits into two rectangles: one is 12 ft by 8 ft, the other is 6 ft by 5 ft.</a:t>
             </a:r>
             <a:endParaRPr lang="en-US" sz="1050" dirty="0"/>
           </a:p>
@@ -6193,7 +6193,7 @@
                 <a:ea typeface="Hanken Grotesk" pitchFamily="34" charset="-122"/>
                 <a:cs typeface="Hanken Grotesk" pitchFamily="34" charset="-120"/>
               </a:rPr>
-              <a:t>First I find one triangle: A = ½ × base × height = ½ × 6 × 5.2.</a:t>
+              <a:t>First rectangle: A = length × width = 12 × 8 = 96 square feet.</a:t>
             </a:r>
             <a:endParaRPr lang="en-US" sz="1050" dirty="0"/>
           </a:p>
@@ -6291,7 +6291,7 @@
                 <a:ea typeface="Hanken Grotesk" pitchFamily="34" charset="-122"/>
                 <a:cs typeface="Hanken Grotesk" pitchFamily="34" charset="-120"/>
               </a:rPr>
-              <a:t>I multiply: 6 × 5.2 = 31.2, then ½ × 31.2 = 15.6 square feet.</a:t>
+              <a:t>Second rectangle: A = 6 × 5 = 30 square feet.</a:t>
             </a:r>
             <a:endParaRPr lang="en-US" sz="1050" dirty="0"/>
           </a:p>
@@ -6389,7 +6389,7 @@
                 <a:ea typeface="Hanken Grotesk" pitchFamily="34" charset="-122"/>
                 <a:cs typeface="Hanken Grotesk" pitchFamily="34" charset="-120"/>
               </a:rPr>
-              <a:t>A hexagon has 6 sides, so it has 6 equal triangles.</a:t>
+              <a:t>The pieces are joined, so I add: 96 + 30 = 126.</a:t>
             </a:r>
             <a:endParaRPr lang="en-US" sz="1050" dirty="0"/>
           </a:p>
@@ -6487,7 +6487,7 @@
                 <a:ea typeface="Hanken Grotesk" pitchFamily="34" charset="-122"/>
                 <a:cs typeface="Hanken Grotesk" pitchFamily="34" charset="-120"/>
               </a:rPr>
-              <a:t>I multiply: 6 × 15.6 = 93.6. So the total area is 93.6 square feet.</a:t>
+              <a:t>So the total area is 126 square feet.</a:t>
             </a:r>
             <a:endParaRPr lang="en-US" sz="1050" dirty="0"/>
           </a:p>
@@ -7177,7 +7177,7 @@
                 <a:ea typeface="Hanken Grotesk" pitchFamily="34" charset="-122"/>
                 <a:cs typeface="Hanken Grotesk" pitchFamily="34" charset="-120"/>
               </a:rPr>
-              <a:t>Reveal Math Grade 6  ·  Unit 5  ·  Lesson 5-4</a:t>
+              <a:t>Reveal Math Grade 6  ·  Unit 5  ·  Lesson 5-5</a:t>
             </a:r>
             <a:endParaRPr lang="en-US" sz="750" dirty="0"/>
           </a:p>
@@ -7403,7 +7403,7 @@
                 <a:ea typeface="Hanken Grotesk" pitchFamily="34" charset="-122"/>
                 <a:cs typeface="Hanken Grotesk" pitchFamily="34" charset="-120"/>
               </a:rPr>
-              <a:t>Sketch a model for today's problem. Label it using Regular Polygon and Decompose.</a:t>
+              <a:t>Sketch a model for today's problem. Label it using Composite Figure and Decompose.</a:t>
             </a:r>
             <a:endParaRPr lang="en-US" sz="1000" dirty="0"/>
           </a:p>
@@ -7551,7 +7551,7 @@
                 <a:ea typeface="Hanken Grotesk" pitchFamily="34" charset="-122"/>
                 <a:cs typeface="Hanken Grotesk" pitchFamily="34" charset="-120"/>
               </a:rPr>
-              <a:t>In 2–3 sentences, explain "A regular polygon splits into the same number of triangles as it has sides, so total area = (one triangle's area) × (number of sides)." in your own words.</a:t>
+              <a:t>In 2–3 sentences, explain "Break the figure into simple shapes. ADD the areas when shapes are joined; SUBTRACT when a piece is cut out." in your own words.</a:t>
             </a:r>
             <a:endParaRPr lang="en-US" sz="1000" dirty="0"/>
           </a:p>
@@ -7847,7 +7847,7 @@
                 <a:ea typeface="Hanken Grotesk" pitchFamily="34" charset="-122"/>
                 <a:cs typeface="Hanken Grotesk" pitchFamily="34" charset="-120"/>
               </a:rPr>
-              <a:t>Write your own problem that uses Regular Polygon, then solve it and make an answer key.</a:t>
+              <a:t>Write your own problem that uses Composite Figure, then solve it and make an answer key.</a:t>
             </a:r>
             <a:endParaRPr lang="en-US" sz="1000" dirty="0"/>
           </a:p>
@@ -8239,7 +8239,7 @@
                 <a:ea typeface="Hanken Grotesk" pitchFamily="34" charset="-122"/>
                 <a:cs typeface="Hanken Grotesk" pitchFamily="34" charset="-120"/>
               </a:rPr>
-              <a:t>Reveal Math Grade 6  ·  Unit 5  ·  Lesson 5-4</a:t>
+              <a:t>Reveal Math Grade 6  ·  Unit 5  ·  Lesson 5-5</a:t>
             </a:r>
             <a:endParaRPr lang="en-US" sz="750" dirty="0"/>
           </a:p>
@@ -8408,7 +8408,7 @@
                 <a:ea typeface="Hanken Grotesk" pitchFamily="34" charset="-122"/>
                 <a:cs typeface="Hanken Grotesk" pitchFamily="34" charset="-120"/>
               </a:rPr>
-              <a:t>A regular hexagon is divided into 6 equal triangles from the center. Each triangle has a base of 6 ft and a height of 5.2 ft. What is the area of one triangle?</a:t>
+              <a:t>An L-shaped room is made of two rectangles: 10 ft × 6 ft and 4 ft × 3 ft. What is the total area?</a:t>
             </a:r>
             <a:endParaRPr lang="en-US" sz="1050" dirty="0"/>
           </a:p>
@@ -8484,7 +8484,7 @@
                 <a:ea typeface="Hanken Grotesk" pitchFamily="34" charset="-122"/>
                 <a:cs typeface="Hanken Grotesk" pitchFamily="34" charset="-120"/>
               </a:rPr>
-              <a:t>Using the triangle from the previous question, what is the total area of the hexagonal skylight?</a:t>
+              <a:t>A rectangular patio is 15 ft × 10 ft with a 5 ft × 4 ft rectangular flower bed cut out. What is the remaining area?</a:t>
             </a:r>
             <a:endParaRPr lang="en-US" sz="1050" dirty="0"/>
           </a:p>
@@ -8560,7 +8560,7 @@
                 <a:ea typeface="Hanken Grotesk" pitchFamily="34" charset="-122"/>
                 <a:cs typeface="Hanken Grotesk" pitchFamily="34" charset="-120"/>
               </a:rPr>
-              <a:t>A regular hexagon is split into 6 triangles, each with base 4 cm and height 3.5 cm. What is the total area?</a:t>
+              <a:t>Find the area of an L-shape made of a 5×3 rectangle and a 2×4 rectangle.</a:t>
             </a:r>
             <a:endParaRPr lang="en-US" sz="1050" dirty="0"/>
           </a:p>
@@ -8697,7 +8697,7 @@
                 <a:ea typeface="Hanken Grotesk" pitchFamily="34" charset="-122"/>
                 <a:cs typeface="Hanken Grotesk" pitchFamily="34" charset="-120"/>
               </a:rPr>
-              <a:t>The octagonal gazebo has 8 center triangles, each with base 5 ft and height 6 ft, and flooring costs $3 per sq ft. Walk through finding the total cost.</a:t>
+              <a:t>The T-shaped conference room has a top of 14 ft by 4 ft and a stem of 6 ft by 10 ft, and carpet costs $5 per sq ft. Talk through finding the total cost.</a:t>
             </a:r>
             <a:endParaRPr lang="en-US" sz="1000" dirty="0"/>
           </a:p>
@@ -9204,7 +9204,7 @@
                 <a:ea typeface="Hanken Grotesk" pitchFamily="34" charset="-122"/>
                 <a:cs typeface="Hanken Grotesk" pitchFamily="34" charset="-120"/>
               </a:rPr>
-              <a:t>Reveal Math Grade 6  ·  Unit 5  ·  Lesson 5-4</a:t>
+              <a:t>Reveal Math Grade 6  ·  Unit 5  ·  Lesson 5-5</a:t>
             </a:r>
             <a:endParaRPr lang="en-US" sz="750" dirty="0"/>
           </a:p>
@@ -9408,7 +9408,7 @@
                 <a:ea typeface="Hanken Grotesk" pitchFamily="34" charset="-122"/>
                 <a:cs typeface="Hanken Grotesk" pitchFamily="34" charset="-120"/>
               </a:rPr>
-              <a:t>Today's key idea is "A regular polygon splits into the same number of triangles as it has sides, so total area = (one triangle's area) × (number of sides)." — and it works because ___.</a:t>
+              <a:t>Today's key idea is "Break the figure into simple shapes. ADD the areas when shapes are joined; SUBTRACT when a piece is cut out." — and it works because ___.</a:t>
             </a:r>
             <a:endParaRPr lang="en-US" sz="1050" dirty="0"/>
           </a:p>
@@ -9557,7 +9557,7 @@
                 <a:ea typeface="Hanken Grotesk" pitchFamily="34" charset="-122"/>
                 <a:cs typeface="Hanken Grotesk" pitchFamily="34" charset="-120"/>
               </a:rPr>
-              <a:t>Because Regular Polygon means ___, but a tricky part is ___, so I have to ___.</a:t>
+              <a:t>Because Composite Figure means ___, but a tricky part is ___, so I have to ___.</a:t>
             </a:r>
             <a:endParaRPr lang="en-US" sz="1050" dirty="0"/>
           </a:p>
@@ -9706,7 +9706,7 @@
                 <a:ea typeface="Hanken Grotesk" pitchFamily="34" charset="-122"/>
                 <a:cs typeface="Hanken Grotesk" pitchFamily="34" charset="-120"/>
               </a:rPr>
-              <a:t>A common mistake with Regular Polygon is ___. It happens because ___, and the fix is ___.</a:t>
+              <a:t>A common mistake with Composite Figure is ___. It happens because ___, and the fix is ___.</a:t>
             </a:r>
             <a:endParaRPr lang="en-US" sz="1050" dirty="0"/>
           </a:p>
@@ -10121,7 +10121,7 @@
                 <a:ea typeface="Hanken Grotesk" pitchFamily="34" charset="-122"/>
                 <a:cs typeface="Hanken Grotesk" pitchFamily="34" charset="-120"/>
               </a:rPr>
-              <a:t>Reveal Math Grade 6  ·  Unit 5  ·  Lesson 5-4</a:t>
+              <a:t>Reveal Math Grade 6  ·  Unit 5  ·  Lesson 5-5</a:t>
             </a:r>
             <a:endParaRPr lang="en-US" sz="750" dirty="0"/>
           </a:p>
@@ -10579,7 +10579,7 @@
                 <a:ea typeface="Hanken Grotesk" pitchFamily="34" charset="-122"/>
                 <a:cs typeface="Hanken Grotesk" pitchFamily="34" charset="-120"/>
               </a:rPr>
-              <a:t>A regular pentagon is decomposed into 5 triangles from its center. Each triangle has a base of 7 inches and a height of 4.8 inches. What is the total area of the pentagon?</a:t>
+              <a:t>A composite figure is made of a 9 ft x 7 ft rectangle and a 3 ft x 4 ft rectangle joined together. What is the total area?</a:t>
             </a:r>
             <a:endParaRPr lang="en-US" sz="1050" dirty="0"/>
           </a:p>
@@ -10618,7 +10618,7 @@
                 <a:ea typeface="Hanken Grotesk" pitchFamily="34" charset="-122"/>
                 <a:cs typeface="Hanken Grotesk" pitchFamily="34" charset="-120"/>
               </a:rPr>
-              <a:t>A.  84 sq in</a:t>
+              <a:t>A.  75 sq ft</a:t>
             </a:r>
             <a:endParaRPr lang="en-US" sz="1000" dirty="0"/>
           </a:p>
@@ -10657,7 +10657,7 @@
                 <a:ea typeface="Hanken Grotesk" pitchFamily="34" charset="-122"/>
                 <a:cs typeface="Hanken Grotesk" pitchFamily="34" charset="-120"/>
               </a:rPr>
-              <a:t>B.  16.8 sq in</a:t>
+              <a:t>B.  63 sq ft</a:t>
             </a:r>
             <a:endParaRPr lang="en-US" sz="1000" dirty="0"/>
           </a:p>
@@ -10696,7 +10696,7 @@
                 <a:ea typeface="Hanken Grotesk" pitchFamily="34" charset="-122"/>
                 <a:cs typeface="Hanken Grotesk" pitchFamily="34" charset="-120"/>
               </a:rPr>
-              <a:t>C.  168 sq in</a:t>
+              <a:t>C.  12 sq ft</a:t>
             </a:r>
             <a:endParaRPr lang="en-US" sz="1000" dirty="0"/>
           </a:p>
@@ -10735,7 +10735,7 @@
                 <a:ea typeface="Hanken Grotesk" pitchFamily="34" charset="-122"/>
                 <a:cs typeface="Hanken Grotesk" pitchFamily="34" charset="-120"/>
               </a:rPr>
-              <a:t>D.  84 in</a:t>
+              <a:t>D.  75 ft</a:t>
             </a:r>
             <a:endParaRPr lang="en-US" sz="1000" dirty="0"/>
           </a:p>
@@ -11249,7 +11249,7 @@
                 <a:ea typeface="Hanken Grotesk" pitchFamily="34" charset="-122"/>
                 <a:cs typeface="Hanken Grotesk" pitchFamily="34" charset="-120"/>
               </a:rPr>
-              <a:t>Reveal Math Grade 6  ·  Unit 5  ·  Lesson 5-4</a:t>
+              <a:t>Reveal Math Grade 6  ·  Unit 5  ·  Lesson 5-5</a:t>
             </a:r>
             <a:endParaRPr lang="en-US" sz="750" dirty="0"/>
           </a:p>
@@ -11363,7 +11363,7 @@
                 <a:ea typeface="Hanken Grotesk" pitchFamily="34" charset="-122"/>
                 <a:cs typeface="Hanken Grotesk" pitchFamily="34" charset="-120"/>
               </a:rPr>
-              <a:t>I can find the area of a regular polygon by decomposing it into triangles.</a:t>
+              <a:t>I can find the area of a composite figure by adding or subtracting the areas of basic shapes.</a:t>
             </a:r>
             <a:endParaRPr lang="en-US" sz="1100" dirty="0"/>
           </a:p>
@@ -12682,7 +12682,7 @@
                 <a:ea typeface="Hanken Grotesk" pitchFamily="34" charset="-122"/>
                 <a:cs typeface="Hanken Grotesk" pitchFamily="34" charset="-120"/>
               </a:rPr>
-              <a:t>Reveal Math Grade 6  ·  Unit 5  ·  Lesson 5-4</a:t>
+              <a:t>Reveal Math Grade 6  ·  Unit 5  ·  Lesson 5-5</a:t>
             </a:r>
             <a:endParaRPr lang="en-US" sz="750" dirty="0"/>
           </a:p>
@@ -12932,7 +12932,7 @@
                 <a:ea typeface="Hanken Grotesk" pitchFamily="34" charset="-122"/>
                 <a:cs typeface="Hanken Grotesk" pitchFamily="34" charset="-120"/>
               </a:rPr>
-              <a:t>I can find the area of a regular polygon by decomposing it into triangles.</a:t>
+              <a:t>I can find the area of a composite figure by adding or subtracting the areas of basic shapes.</a:t>
             </a:r>
             <a:endParaRPr lang="en-US" sz="1800" dirty="0"/>
           </a:p>
@@ -13104,7 +13104,7 @@
                 <a:ea typeface="Hanken Grotesk" pitchFamily="34" charset="-122"/>
                 <a:cs typeface="Hanken Grotesk" pitchFamily="34" charset="-120"/>
               </a:rPr>
-              <a:t>I can explain my steps using the words regular polygon, decompose, triangle, and composite.</a:t>
+              <a:t>I can explain my steps using the words composite figure, decompose, add, and subtract.</a:t>
             </a:r>
             <a:endParaRPr lang="en-US" sz="1700" dirty="0"/>
           </a:p>
@@ -13496,7 +13496,7 @@
                 <a:ea typeface="Hanken Grotesk" pitchFamily="34" charset="-122"/>
                 <a:cs typeface="Hanken Grotesk" pitchFamily="34" charset="-120"/>
               </a:rPr>
-              <a:t>Reveal Math Grade 6  ·  Unit 5  ·  Lesson 5-4</a:t>
+              <a:t>Reveal Math Grade 6  ·  Unit 5  ·  Lesson 5-5</a:t>
             </a:r>
             <a:endParaRPr lang="en-US" sz="750" dirty="0"/>
           </a:p>
@@ -13693,7 +13693,7 @@
                 <a:ea typeface="Hanken Grotesk" pitchFamily="34" charset="-122"/>
                 <a:cs typeface="Hanken Grotesk" pitchFamily="34" charset="-120"/>
               </a:rPr>
-              <a:t>The hexagonal skylight has sides of 6 feet, and each triangle from the center has a height of 5.2 feet. Why is it helpful to break a hexagon into triangles to find its area?</a:t>
+              <a:t>The L-shaped room splits into a 12 ft by 8 ft rectangle and a 6 ft by 5 ft rectangle. Why is it easier to find the area after you decompose the L into two rectangles?</a:t>
             </a:r>
             <a:endParaRPr lang="en-US" sz="1400" dirty="0"/>
           </a:p>
@@ -14023,7 +14023,7 @@
                 <a:ea typeface="Hanken Grotesk" pitchFamily="34" charset="-122"/>
                 <a:cs typeface="Hanken Grotesk" pitchFamily="34" charset="-120"/>
               </a:rPr>
-              <a:t>regular polygon</a:t>
+              <a:t>composite figure</a:t>
             </a:r>
             <a:endParaRPr lang="en-US" sz="900" dirty="0"/>
           </a:p>
@@ -14117,7 +14117,7 @@
                 <a:ea typeface="Hanken Grotesk" pitchFamily="34" charset="-122"/>
                 <a:cs typeface="Hanken Grotesk" pitchFamily="34" charset="-120"/>
               </a:rPr>
-              <a:t>triangle</a:t>
+              <a:t>add</a:t>
             </a:r>
             <a:endParaRPr lang="en-US" sz="900" dirty="0"/>
           </a:p>
@@ -14164,7 +14164,7 @@
                 <a:ea typeface="Hanken Grotesk" pitchFamily="34" charset="-122"/>
                 <a:cs typeface="Hanken Grotesk" pitchFamily="34" charset="-120"/>
               </a:rPr>
-              <a:t>composite</a:t>
+              <a:t>subtract</a:t>
             </a:r>
             <a:endParaRPr lang="en-US" sz="900" dirty="0"/>
           </a:p>
@@ -14603,7 +14603,7 @@
                 <a:ea typeface="Hanken Grotesk" pitchFamily="34" charset="-122"/>
                 <a:cs typeface="Hanken Grotesk" pitchFamily="34" charset="-120"/>
               </a:rPr>
-              <a:t>Reveal Math Grade 6  ·  Unit 5  ·  Lesson 5-4</a:t>
+              <a:t>Reveal Math Grade 6  ·  Unit 5  ·  Lesson 5-5</a:t>
             </a:r>
             <a:endParaRPr lang="en-US" sz="750" dirty="0"/>
           </a:p>
@@ -14800,7 +14800,7 @@
                 <a:ea typeface="Hanken Grotesk" pitchFamily="34" charset="-122"/>
                 <a:cs typeface="Hanken Grotesk" pitchFamily="34" charset="-120"/>
               </a:rPr>
-              <a:t>You matched each regular polygon to its number of center triangles. What pattern connects the number of SIDES to the number of TRIANGLES, and why?</a:t>
+              <a:t>For the U-shaped pool you subtracted a 6 ft by 4 ft cutout from a 14 ft by 10 ft rectangle. How do you decide when to ADD areas and when to SUBTRACT?</a:t>
             </a:r>
             <a:endParaRPr lang="en-US" sz="1400" dirty="0"/>
           </a:p>
@@ -15130,7 +15130,7 @@
                 <a:ea typeface="Hanken Grotesk" pitchFamily="34" charset="-122"/>
                 <a:cs typeface="Hanken Grotesk" pitchFamily="34" charset="-120"/>
               </a:rPr>
-              <a:t>regular polygon</a:t>
+              <a:t>composite figure</a:t>
             </a:r>
             <a:endParaRPr lang="en-US" sz="900" dirty="0"/>
           </a:p>
@@ -15224,7 +15224,7 @@
                 <a:ea typeface="Hanken Grotesk" pitchFamily="34" charset="-122"/>
                 <a:cs typeface="Hanken Grotesk" pitchFamily="34" charset="-120"/>
               </a:rPr>
-              <a:t>triangle</a:t>
+              <a:t>add</a:t>
             </a:r>
             <a:endParaRPr lang="en-US" sz="900" dirty="0"/>
           </a:p>
@@ -15271,7 +15271,7 @@
                 <a:ea typeface="Hanken Grotesk" pitchFamily="34" charset="-122"/>
                 <a:cs typeface="Hanken Grotesk" pitchFamily="34" charset="-120"/>
               </a:rPr>
-              <a:t>composite</a:t>
+              <a:t>subtract</a:t>
             </a:r>
             <a:endParaRPr lang="en-US" sz="900" dirty="0"/>
           </a:p>
@@ -15318,7 +15318,7 @@
                 <a:ea typeface="Hanken Grotesk" pitchFamily="34" charset="-122"/>
                 <a:cs typeface="Hanken Grotesk" pitchFamily="34" charset="-120"/>
               </a:rPr>
-              <a:t>formula</a:t>
+              <a:t>cutout</a:t>
             </a:r>
             <a:endParaRPr lang="en-US" sz="900" dirty="0"/>
           </a:p>
@@ -15710,7 +15710,7 @@
                 <a:ea typeface="Hanken Grotesk" pitchFamily="34" charset="-122"/>
                 <a:cs typeface="Hanken Grotesk" pitchFamily="34" charset="-120"/>
               </a:rPr>
-              <a:t>Reveal Math Grade 6  ·  Unit 5  ·  Lesson 5-4</a:t>
+              <a:t>Reveal Math Grade 6  ·  Unit 5  ·  Lesson 5-5</a:t>
             </a:r>
             <a:endParaRPr lang="en-US" sz="750" dirty="0"/>
           </a:p>
@@ -15907,7 +15907,7 @@
                 <a:ea typeface="Hanken Grotesk" pitchFamily="34" charset="-122"/>
                 <a:cs typeface="Hanken Grotesk" pitchFamily="34" charset="-120"/>
               </a:rPr>
-              <a:t>The octagonal gazebo has 8 center triangles, each with base 5 ft and height 6 ft, and flooring costs $3 per sq ft. Walk through finding the total cost.</a:t>
+              <a:t>The T-shaped conference room has a top of 14 ft by 4 ft and a stem of 6 ft by 10 ft, and carpet costs $5 per sq ft. Talk through finding the total cost.</a:t>
             </a:r>
             <a:endParaRPr lang="en-US" sz="1400" dirty="0"/>
           </a:p>
@@ -16237,7 +16237,7 @@
                 <a:ea typeface="Hanken Grotesk" pitchFamily="34" charset="-122"/>
                 <a:cs typeface="Hanken Grotesk" pitchFamily="34" charset="-120"/>
               </a:rPr>
-              <a:t>regular polygon</a:t>
+              <a:t>composite figure</a:t>
             </a:r>
             <a:endParaRPr lang="en-US" sz="900" dirty="0"/>
           </a:p>
@@ -16331,7 +16331,7 @@
                 <a:ea typeface="Hanken Grotesk" pitchFamily="34" charset="-122"/>
                 <a:cs typeface="Hanken Grotesk" pitchFamily="34" charset="-120"/>
               </a:rPr>
-              <a:t>triangle</a:t>
+              <a:t>add</a:t>
             </a:r>
             <a:endParaRPr lang="en-US" sz="900" dirty="0"/>
           </a:p>
@@ -16378,7 +16378,7 @@
                 <a:ea typeface="Hanken Grotesk" pitchFamily="34" charset="-122"/>
                 <a:cs typeface="Hanken Grotesk" pitchFamily="34" charset="-120"/>
               </a:rPr>
-              <a:t>composite</a:t>
+              <a:t>subtract</a:t>
             </a:r>
             <a:endParaRPr lang="en-US" sz="900" dirty="0"/>
           </a:p>
@@ -16817,7 +16817,7 @@
                 <a:ea typeface="Hanken Grotesk" pitchFamily="34" charset="-122"/>
                 <a:cs typeface="Hanken Grotesk" pitchFamily="34" charset="-120"/>
               </a:rPr>
-              <a:t>Reveal Math Grade 6  ·  Unit 5  ·  Lesson 5-4</a:t>
+              <a:t>Reveal Math Grade 6  ·  Unit 5  ·  Lesson 5-5</a:t>
             </a:r>
             <a:endParaRPr lang="en-US" sz="750" dirty="0"/>
           </a:p>
@@ -17014,7 +17014,7 @@
                 <a:ea typeface="Hanken Grotesk" pitchFamily="34" charset="-122"/>
                 <a:cs typeface="Hanken Grotesk" pitchFamily="34" charset="-120"/>
               </a:rPr>
-              <a:t>During practice on Area of Regular Polygons, what strategy did you use when a problem felt tricky?</a:t>
+              <a:t>During practice on Area of Composite Figures, what strategy did you use when a problem felt tricky?</a:t>
             </a:r>
             <a:endParaRPr lang="en-US" sz="1400" dirty="0"/>
           </a:p>
@@ -17344,7 +17344,7 @@
                 <a:ea typeface="Hanken Grotesk" pitchFamily="34" charset="-122"/>
                 <a:cs typeface="Hanken Grotesk" pitchFamily="34" charset="-120"/>
               </a:rPr>
-              <a:t>Regular Polygon</a:t>
+              <a:t>Composite Figure</a:t>
             </a:r>
             <a:endParaRPr lang="en-US" sz="900" dirty="0"/>
           </a:p>
@@ -17438,7 +17438,7 @@
                 <a:ea typeface="Hanken Grotesk" pitchFamily="34" charset="-122"/>
                 <a:cs typeface="Hanken Grotesk" pitchFamily="34" charset="-120"/>
               </a:rPr>
-              <a:t>Triangle</a:t>
+              <a:t>Add</a:t>
             </a:r>
             <a:endParaRPr lang="en-US" sz="900" dirty="0"/>
           </a:p>
@@ -17485,7 +17485,7 @@
                 <a:ea typeface="Hanken Grotesk" pitchFamily="34" charset="-122"/>
                 <a:cs typeface="Hanken Grotesk" pitchFamily="34" charset="-120"/>
               </a:rPr>
-              <a:t>Composite</a:t>
+              <a:t>Subtract</a:t>
             </a:r>
             <a:endParaRPr lang="en-US" sz="900" dirty="0"/>
           </a:p>
@@ -17877,7 +17877,7 @@
                 <a:ea typeface="Hanken Grotesk" pitchFamily="34" charset="-122"/>
                 <a:cs typeface="Hanken Grotesk" pitchFamily="34" charset="-120"/>
               </a:rPr>
-              <a:t>Reveal Math Grade 6  ·  Unit 5  ·  Lesson 5-4</a:t>
+              <a:t>Reveal Math Grade 6  ·  Unit 5  ·  Lesson 5-5</a:t>
             </a:r>
             <a:endParaRPr lang="en-US" sz="750" dirty="0"/>
           </a:p>
@@ -18071,7 +18071,7 @@
                 <a:ea typeface="Hanken Grotesk" pitchFamily="34" charset="-122"/>
                 <a:cs typeface="Hanken Grotesk" pitchFamily="34" charset="-120"/>
               </a:rPr>
-              <a:t>Your architecture firm is designing a hexagonal skylight for the lobby of a new museum. The glass fabricator needs to know the total area so they can cut the correct amount of glass. Each side of the hexagon is 6 feet, and the height of each triangle formed from the center is 5.2 feet.</a:t>
+              <a:t>Your architecture firm is calculating the floor area of an L-shaped room for a client's new home. The contractor needs the total area to order the correct amount of flooring. The room can be split into two rectangles: one is 12 feet by 8 feet and the other is 6 feet by 5 feet.</a:t>
             </a:r>
             <a:endParaRPr lang="en-US" sz="1150" dirty="0"/>
           </a:p>
@@ -18296,7 +18296,7 @@
                 <a:ea typeface="Hanken Grotesk" pitchFamily="34" charset="-122"/>
                 <a:cs typeface="Hanken Grotesk" pitchFamily="34" charset="-120"/>
               </a:rPr>
-              <a:t>•  What shape is the skylight?</a:t>
+              <a:t>•  What does the shape of the room look like?</a:t>
             </a:r>
             <a:endParaRPr lang="en-US" sz="1000" dirty="0"/>
           </a:p>
@@ -18316,7 +18316,7 @@
                 <a:ea typeface="Hanken Grotesk" pitchFamily="34" charset="-122"/>
                 <a:cs typeface="Hanken Grotesk" pitchFamily="34" charset="-120"/>
               </a:rPr>
-              <a:t>•  How many sides does a hexagon have?</a:t>
+              <a:t>•  Can you see simpler shapes inside the L-shape?</a:t>
             </a:r>
             <a:endParaRPr lang="en-US" sz="1000" dirty="0"/>
           </a:p>
@@ -18336,7 +18336,7 @@
                 <a:ea typeface="Hanken Grotesk" pitchFamily="34" charset="-122"/>
                 <a:cs typeface="Hanken Grotesk" pitchFamily="34" charset="-120"/>
               </a:rPr>
-              <a:t>•  Can you see smaller shapes inside the hexagon?</a:t>
+              <a:t>•  What measurements are given for each part?</a:t>
             </a:r>
             <a:endParaRPr lang="en-US" sz="1000" dirty="0"/>
           </a:p>
@@ -18453,7 +18453,7 @@
                 <a:ea typeface="Hanken Grotesk" pitchFamily="34" charset="-122"/>
                 <a:cs typeface="Hanken Grotesk" pitchFamily="34" charset="-120"/>
               </a:rPr>
-              <a:t>•  How can we break a hexagon into shapes whose area we already know?</a:t>
+              <a:t>•  Is there more than one way to split this shape into rectangles?</a:t>
             </a:r>
             <a:endParaRPr lang="en-US" sz="1000" dirty="0"/>
           </a:p>
@@ -18473,7 +18473,7 @@
                 <a:ea typeface="Hanken Grotesk" pitchFamily="34" charset="-122"/>
                 <a:cs typeface="Hanken Grotesk" pitchFamily="34" charset="-120"/>
               </a:rPr>
-              <a:t>•  Does this strategy work for other regular polygons?</a:t>
+              <a:t>•  Could you use subtraction instead of addition to find the area?</a:t>
             </a:r>
             <a:endParaRPr lang="en-US" sz="1000" dirty="0"/>
           </a:p>
@@ -18865,7 +18865,7 @@
                 <a:ea typeface="Hanken Grotesk" pitchFamily="34" charset="-122"/>
                 <a:cs typeface="Hanken Grotesk" pitchFamily="34" charset="-120"/>
               </a:rPr>
-              <a:t>Reveal Math Grade 6  ·  Unit 5  ·  Lesson 5-4</a:t>
+              <a:t>Reveal Math Grade 6  ·  Unit 5  ·  Lesson 5-5</a:t>
             </a:r>
             <a:endParaRPr lang="en-US" sz="750" dirty="0"/>
           </a:p>
@@ -19161,7 +19161,7 @@
                           <a:ea typeface="Hanken Grotesk" pitchFamily="34" charset="-122"/>
                           <a:cs typeface="Hanken Grotesk" pitchFamily="34" charset="-120"/>
                         </a:rPr>
-                        <a:t>Regular Polygon</a:t>
+                        <a:t>Composite Figure</a:t>
                       </a:r>
                       <a:pPr indent="0" marL="0">
                         <a:buNone/>
@@ -19185,7 +19185,7 @@
                           <a:ea typeface="Hanken Grotesk" pitchFamily="34" charset="-122"/>
                           <a:cs typeface="Hanken Grotesk" pitchFamily="34" charset="-120"/>
                         </a:rPr>
-                        <a:t>Polígono regular</a:t>
+                        <a:t>Figura compuesta</a:t>
                       </a:r>
                       <a:endParaRPr lang="en-US" sz="950" dirty="0">
                         <a:latin typeface="Hanken Grotesk" charset="0"/>
@@ -19253,7 +19253,7 @@
                           <a:ea typeface="Hanken Grotesk" pitchFamily="34" charset="-122"/>
                           <a:cs typeface="Hanken Grotesk" pitchFamily="34" charset="-120"/>
                         </a:rPr>
-                        <a:t>A shape where all sides and all angles are equal.</a:t>
+                        <a:t>A shape made by putting two or more simple shapes together.</a:t>
                       </a:r>
                       <a:pPr indent="0" marL="0">
                         <a:buNone/>
@@ -19277,7 +19277,7 @@
                           <a:ea typeface="Hanken Grotesk" pitchFamily="34" charset="-122"/>
                           <a:cs typeface="Hanken Grotesk" pitchFamily="34" charset="-120"/>
                         </a:rPr>
-                        <a:t>Una figura donde todos los lados y ángulos son iguales.</a:t>
+                        <a:t>Una figura formada al juntar dos o más figuras simples.</a:t>
                       </a:r>
                       <a:endParaRPr lang="en-US" sz="900" dirty="0">
                         <a:latin typeface="Hanken Grotesk" charset="0"/>
@@ -19345,7 +19345,7 @@
                           <a:ea typeface="Hanken Grotesk" pitchFamily="34" charset="-122"/>
                           <a:cs typeface="Hanken Grotesk" pitchFamily="34" charset="-120"/>
                         </a:rPr>
-                        <a:t>A stop sign is a regular octagon — all 8 sides are the same length and all 8 angles are equal</a:t>
+                        <a:t>An L-shaped room = a 12×8 rectangle joined to a 6×5 rectangle; total area = 96 + 30 = 126 sq ft</a:t>
                       </a:r>
                       <a:endParaRPr lang="en-US" sz="900" dirty="0">
                         <a:latin typeface="Hanken Grotesk" charset="0"/>
@@ -19599,7 +19599,7 @@
                           <a:ea typeface="Hanken Grotesk" pitchFamily="34" charset="-122"/>
                           <a:cs typeface="Hanken Grotesk" pitchFamily="34" charset="-120"/>
                         </a:rPr>
-                        <a:t>Draw lines from the center of a hexagon to each corner → you get 6 equal triangles you can find the area of</a:t>
+                        <a:t>Draw a dashed line across the L-shape to split it into two rectangles — now you can find each area separately</a:t>
                       </a:r>
                       <a:endParaRPr lang="en-US" sz="900" dirty="0">
                         <a:latin typeface="Hanken Grotesk" charset="0"/>
@@ -19669,7 +19669,7 @@
                           <a:ea typeface="Hanken Grotesk" pitchFamily="34" charset="-122"/>
                           <a:cs typeface="Hanken Grotesk" pitchFamily="34" charset="-120"/>
                         </a:rPr>
-                        <a:t>Triangle</a:t>
+                        <a:t>Add</a:t>
                       </a:r>
                       <a:pPr indent="0" marL="0">
                         <a:buNone/>
@@ -19693,7 +19693,7 @@
                           <a:ea typeface="Hanken Grotesk" pitchFamily="34" charset="-122"/>
                           <a:cs typeface="Hanken Grotesk" pitchFamily="34" charset="-120"/>
                         </a:rPr>
-                        <a:t>Triángulo</a:t>
+                        <a:t>Sumar</a:t>
                       </a:r>
                       <a:endParaRPr lang="en-US" sz="950" dirty="0">
                         <a:latin typeface="Hanken Grotesk" charset="0"/>
@@ -19761,7 +19761,7 @@
                           <a:ea typeface="Hanken Grotesk" pitchFamily="34" charset="-122"/>
                           <a:cs typeface="Hanken Grotesk" pitchFamily="34" charset="-120"/>
                         </a:rPr>
-                        <a:t>A shape with three sides.</a:t>
+                        <a:t>Add up the areas of the smaller shapes to get the total.</a:t>
                       </a:r>
                       <a:pPr indent="0" marL="0">
                         <a:buNone/>
@@ -19785,7 +19785,7 @@
                           <a:ea typeface="Hanken Grotesk" pitchFamily="34" charset="-122"/>
                           <a:cs typeface="Hanken Grotesk" pitchFamily="34" charset="-120"/>
                         </a:rPr>
-                        <a:t>Una figura de tres lados.</a:t>
+                        <a:t>Sumar las áreas de las figuras pequeñas para obtener el total.</a:t>
                       </a:r>
                       <a:endParaRPr lang="en-US" sz="900" dirty="0">
                         <a:latin typeface="Hanken Grotesk" charset="0"/>
@@ -19853,7 +19853,7 @@
                           <a:ea typeface="Hanken Grotesk" pitchFamily="34" charset="-122"/>
                           <a:cs typeface="Hanken Grotesk" pitchFamily="34" charset="-120"/>
                         </a:rPr>
-                        <a:t>Each triangle inside a decomposed hexagon has a base = one side of the hexagon and height = distance from center to side</a:t>
+                        <a:t>T-shaped hallway: top rectangle = 30 sq ft, bottom rectangle = 28 sq ft → total = 30 + 28 = 58 sq ft</a:t>
                       </a:r>
                       <a:endParaRPr lang="en-US" sz="900" dirty="0">
                         <a:latin typeface="Hanken Grotesk" charset="0"/>
@@ -19923,7 +19923,7 @@
                           <a:ea typeface="Hanken Grotesk" pitchFamily="34" charset="-122"/>
                           <a:cs typeface="Hanken Grotesk" pitchFamily="34" charset="-120"/>
                         </a:rPr>
-                        <a:t>Composite</a:t>
+                        <a:t>Subtract</a:t>
                       </a:r>
                       <a:pPr indent="0" marL="0">
                         <a:buNone/>
@@ -19947,7 +19947,7 @@
                           <a:ea typeface="Hanken Grotesk" pitchFamily="34" charset="-122"/>
                           <a:cs typeface="Hanken Grotesk" pitchFamily="34" charset="-120"/>
                         </a:rPr>
-                        <a:t>Compuesto</a:t>
+                        <a:t>Restar</a:t>
                       </a:r>
                       <a:endParaRPr lang="en-US" sz="950" dirty="0">
                         <a:latin typeface="Hanken Grotesk" charset="0"/>
@@ -20015,7 +20015,7 @@
                           <a:ea typeface="Hanken Grotesk" pitchFamily="34" charset="-122"/>
                           <a:cs typeface="Hanken Grotesk" pitchFamily="34" charset="-120"/>
                         </a:rPr>
-                        <a:t>Made by putting two or more simple shapes together.</a:t>
+                        <a:t>Take away the area of a missing piece from a bigger shape.</a:t>
                       </a:r>
                       <a:pPr indent="0" marL="0">
                         <a:buNone/>
@@ -20039,7 +20039,7 @@
                           <a:ea typeface="Hanken Grotesk" pitchFamily="34" charset="-122"/>
                           <a:cs typeface="Hanken Grotesk" pitchFamily="34" charset="-120"/>
                         </a:rPr>
-                        <a:t>Formada al juntar dos o más figuras simples.</a:t>
+                        <a:t>Quitar el área de una parte que falta de una figura más grande.</a:t>
                       </a:r>
                       <a:endParaRPr lang="en-US" sz="900" dirty="0">
                         <a:latin typeface="Hanken Grotesk" charset="0"/>
@@ -20107,7 +20107,7 @@
                           <a:ea typeface="Hanken Grotesk" pitchFamily="34" charset="-122"/>
                           <a:cs typeface="Hanken Grotesk" pitchFamily="34" charset="-120"/>
                         </a:rPr>
-                        <a:t>6 triangles, each with area 15 sq ft, combine to form a hexagon with total area = 6 × 15 = 90 sq ft</a:t>
+                        <a:t>A 14×10 pool with a 6×4 cutout: 140 − 24 = 116 sq ft of water surface</a:t>
                       </a:r>
                       <a:endParaRPr lang="en-US" sz="900" dirty="0">
                         <a:latin typeface="Hanken Grotesk" charset="0"/>
@@ -20361,7 +20361,7 @@
                           <a:ea typeface="Hanken Grotesk" pitchFamily="34" charset="-122"/>
                           <a:cs typeface="Hanken Grotesk" pitchFamily="34" charset="-120"/>
                         </a:rPr>
-                        <a:t>For a regular hexagon: Total Area = 6 × (½ × b × h), where b = side length and h = height of each triangle</a:t>
+                        <a:t>Rectangle: A = l × w; Triangle: A = ½ × b × h; use the right formula for each piece of a composite figure</a:t>
                       </a:r>
                       <a:endParaRPr lang="en-US" sz="900" dirty="0">
                         <a:latin typeface="Hanken Grotesk" charset="0"/>
@@ -20450,7 +20450,7 @@
                 <a:ea typeface="Outfit" pitchFamily="34" charset="-122"/>
                 <a:cs typeface="Outfit" pitchFamily="34" charset="-120"/>
               </a:rPr>
-              <a:t>Regular Polygon — example vs. non-example:</a:t>
+              <a:t>Composite Figure — example vs. non-example:</a:t>
             </a:r>
             <a:endParaRPr lang="en-US" sz="950" dirty="0"/>
           </a:p>
@@ -20537,7 +20537,7 @@
                 <a:ea typeface="Hanken Grotesk" pitchFamily="34" charset="-122"/>
                 <a:cs typeface="Hanken Grotesk" pitchFamily="34" charset="-120"/>
               </a:rPr>
-              <a:t>A square  </a:t>
+              <a:t>An L-shaped room made of two rectangles  </a:t>
             </a:r>
             <a:pPr indent="0" marL="0">
               <a:buNone/>
@@ -20551,7 +20551,7 @@
                 <a:ea typeface="Hanken Grotesk" pitchFamily="34" charset="-122"/>
                 <a:cs typeface="Hanken Grotesk" pitchFamily="34" charset="-120"/>
               </a:rPr>
-              <a:t>All sides and all angles are equal.</a:t>
+              <a:t>It is built from two basic shapes.</a:t>
             </a:r>
             <a:endParaRPr lang="en-US" sz="900" dirty="0"/>
           </a:p>
@@ -20638,7 +20638,7 @@
                 <a:ea typeface="Hanken Grotesk" pitchFamily="34" charset="-122"/>
                 <a:cs typeface="Hanken Grotesk" pitchFamily="34" charset="-120"/>
               </a:rPr>
-              <a:t>A rectangle that is not a square  </a:t>
+              <a:t>A single square  </a:t>
             </a:r>
             <a:pPr indent="0" marL="0">
               <a:buNone/>
@@ -20652,7 +20652,7 @@
                 <a:ea typeface="Hanken Grotesk" pitchFamily="34" charset="-122"/>
                 <a:cs typeface="Hanken Grotesk" pitchFamily="34" charset="-120"/>
               </a:rPr>
-              <a:t>Its sides are not all equal.</a:t>
+              <a:t>One basic shape alone is not composite.</a:t>
             </a:r>
             <a:endParaRPr lang="en-US" sz="900" dirty="0"/>
           </a:p>
@@ -21044,7 +21044,7 @@
                 <a:ea typeface="Hanken Grotesk" pitchFamily="34" charset="-122"/>
                 <a:cs typeface="Hanken Grotesk" pitchFamily="34" charset="-120"/>
               </a:rPr>
-              <a:t>Reveal Math Grade 6  ·  Unit 5  ·  Lesson 5-4</a:t>
+              <a:t>Reveal Math Grade 6  ·  Unit 5  ·  Lesson 5-5</a:t>
             </a:r>
             <a:endParaRPr lang="en-US" sz="750" dirty="0"/>
           </a:p>
@@ -21199,7 +21199,7 @@
                 <a:ea typeface="Outfit" pitchFamily="34" charset="-122"/>
                 <a:cs typeface="Outfit" pitchFamily="34" charset="-120"/>
               </a:rPr>
-              <a:t>How do we find the area of a regular polygon?</a:t>
+              <a:t>How do we find the area of a composite figure?</a:t>
             </a:r>
             <a:endParaRPr lang="en-US" sz="1200" dirty="0"/>
           </a:p>
@@ -21297,7 +21297,7 @@
                 <a:ea typeface="Hanken Grotesk" pitchFamily="34" charset="-122"/>
                 <a:cs typeface="Hanken Grotesk" pitchFamily="34" charset="-120"/>
               </a:rPr>
-              <a:t>Now a smaller regular pentagon: each of its 5 triangles has base 4 cm and height 3 cm.</a:t>
+              <a:t>Now an L-shape made of a 5 ft by 4 ft rectangle and a 3 ft by 2 ft rectangle.</a:t>
             </a:r>
             <a:endParaRPr lang="en-US" sz="1050" dirty="0"/>
           </a:p>
@@ -21395,7 +21395,7 @@
                 <a:ea typeface="Hanken Grotesk" pitchFamily="34" charset="-122"/>
                 <a:cs typeface="Hanken Grotesk" pitchFamily="34" charset="-120"/>
               </a:rPr>
-              <a:t>First find one triangle: ½ × 4 × 3. What is 4 × 3? Yes, 12, and half of 12 is 6 sq cm.</a:t>
+              <a:t>First rectangle: 5 × 4 = 20 square feet.</a:t>
             </a:r>
             <a:endParaRPr lang="en-US" sz="1050" dirty="0"/>
           </a:p>
@@ -21493,7 +21493,7 @@
                 <a:ea typeface="Hanken Grotesk" pitchFamily="34" charset="-122"/>
                 <a:cs typeface="Hanken Grotesk" pitchFamily="34" charset="-120"/>
               </a:rPr>
-              <a:t>A pentagon has 5 sides, so how many triangles? Yes, 5.</a:t>
+              <a:t>Second rectangle: 3 × 2 = 6 square feet.</a:t>
             </a:r>
             <a:endParaRPr lang="en-US" sz="1050" dirty="0"/>
           </a:p>
@@ -21591,7 +21591,7 @@
                 <a:ea typeface="Hanken Grotesk" pitchFamily="34" charset="-122"/>
                 <a:cs typeface="Hanken Grotesk" pitchFamily="34" charset="-120"/>
               </a:rPr>
-              <a:t>Multiply: 5 × 6 = 30, so the total area is 30 square centimeters.</a:t>
+              <a:t>Are they joined or cut out? Joined, so we add: 20 + 6 = 26 square feet.</a:t>
             </a:r>
             <a:endParaRPr lang="en-US" sz="1050" dirty="0"/>
           </a:p>
@@ -21767,7 +21767,7 @@
                 <a:ea typeface="Hanken Grotesk" pitchFamily="34" charset="-122"/>
                 <a:cs typeface="Hanken Grotesk" pitchFamily="34" charset="-120"/>
               </a:rPr>
-              <a:t>The hexagonal skylight has sides of 6 feet, and each triangle from the center has a height of 5.2 feet. Why is it helpful to break a hexagon into triangles to find its area?</a:t>
+              <a:t>The L-shaped room splits into a 12 ft by 8 ft rectangle and a 6 ft by 5 ft rectangle. Why is it easier to find the area after you decompose the L into two rectangles?</a:t>
             </a:r>
             <a:endParaRPr lang="en-US" sz="1000" dirty="0"/>
           </a:p>
@@ -21879,7 +21879,7 @@
                 <a:ea typeface="Hanken Grotesk" pitchFamily="34" charset="-122"/>
                 <a:cs typeface="Hanken Grotesk" pitchFamily="34" charset="-120"/>
               </a:rPr>
-              <a:t>A regular polygon splits into the same number of triangles as it has sides, so total area = (one triangle's area) × (number of sides).</a:t>
+              <a:t>Break the figure into simple shapes. ADD the areas when shapes are joined; SUBTRACT when a piece is cut out.</a:t>
             </a:r>
             <a:endParaRPr lang="en-US" sz="950" dirty="0"/>
           </a:p>
